--- a/media/resources/files/EkiOrunduuOnduktar_Koshuu_Kemituu_XO_yApQHBo.pptx
+++ b/media/resources/files/EkiOrunduuOnduktar_Koshuu_Kemituu_XO_yApQHBo.pptx
@@ -8708,7 +8708,7 @@
                 <a:ea typeface="+mn-ea"/>
                 <a:cs typeface="+mn-cs"/>
               </a:rPr>
-              <a:t>Турдуу пикирлер учун ыраазычылык билдиребиз.</a:t>
+              <a:t>Түрдүү пикирлер үчүн ыраазычылык билдиребиз.</a:t>
             </a:r>
           </a:p>
           <a:p>

--- a/media/resources/files/EkiOrunduuOnduktar_Koshuu_Kemituu_XO_yApQHBo.pptx
+++ b/media/resources/files/EkiOrunduuOnduktar_Koshuu_Kemituu_XO_yApQHBo.pptx
@@ -4013,7 +4013,7 @@
                 <a:ea typeface="+mn-ea"/>
                 <a:cs typeface="Arial" panose="020B0604020202020204" pitchFamily="34" charset="0"/>
               </a:rPr>
-              <a:t>Мугалим үчүн жооп баракчасы жана таратма материалдар камтылган.</a:t>
+              <a:t>Мугалим үчүн жооп барагы жана таратма материалдар бар.</a:t>
             </a:r>
           </a:p>
           <a:p>
@@ -4082,7 +4082,7 @@
                 <a:ea typeface="+mn-ea"/>
                 <a:cs typeface="Arial" panose="020B0604020202020204" pitchFamily="34" charset="0"/>
               </a:rPr>
-              <a:t>Кайсы команда туура жооп бергенине жараша '</a:t>
+              <a:t>Туура жооп берген командага жараша «</a:t>
             </a:r>
             <a:r>
               <a:rPr kumimoji="0" lang="en-GB" sz="2000" b="0" i="0" u="sng" strike="noStrike" kern="1200" cap="none" spc="0" normalizeH="0" baseline="0" noProof="0" dirty="0">
@@ -4099,7 +4099,7 @@
                 <a:ea typeface="+mn-ea"/>
                 <a:cs typeface="Arial" panose="020B0604020202020204" pitchFamily="34" charset="0"/>
               </a:rPr>
-              <a:t>X' </a:t>
+              <a:t>X» </a:t>
             </a:r>
             <a:r>
               <a:rPr kumimoji="0" lang="ru-RU" sz="2000" b="0" i="0" u="sng" strike="noStrike" kern="1200" cap="none" spc="0" normalizeH="0" baseline="0" noProof="0" dirty="0">
@@ -4116,7 +4116,7 @@
                 <a:ea typeface="+mn-ea"/>
                 <a:cs typeface="Arial" panose="020B0604020202020204" pitchFamily="34" charset="0"/>
               </a:rPr>
-              <a:t>же '</a:t>
+              <a:t>же «</a:t>
             </a:r>
             <a:r>
               <a:rPr kumimoji="0" lang="en-GB" sz="2000" b="0" i="0" u="sng" strike="noStrike" kern="1200" cap="none" spc="0" normalizeH="0" baseline="0" noProof="0" dirty="0">
@@ -4133,7 +4133,7 @@
                 <a:ea typeface="+mn-ea"/>
                 <a:cs typeface="Arial" panose="020B0604020202020204" pitchFamily="34" charset="0"/>
               </a:rPr>
-              <a:t>O' </a:t>
+              <a:t>O» </a:t>
             </a:r>
             <a:r>
               <a:rPr kumimoji="0" lang="ru-RU" sz="2000" b="0" i="0" u="sng" strike="noStrike" kern="1200" cap="none" spc="0" normalizeH="0" baseline="0" noProof="0" dirty="0">
@@ -4150,7 +4150,7 @@
                 <a:ea typeface="+mn-ea"/>
                 <a:cs typeface="Arial" panose="020B0604020202020204" pitchFamily="34" charset="0"/>
               </a:rPr>
-              <a:t>баскычын басыңыз/тийип коюңуз</a:t>
+              <a:t>баскычын басыңыз</a:t>
             </a:r>
             <a:r>
               <a:rPr kumimoji="0" lang="en-GB" sz="2000" b="0" i="0" u="none" strike="noStrike" kern="1200" cap="none" spc="0" normalizeH="0" baseline="0" noProof="0" dirty="0">
@@ -4794,7 +4794,7 @@
             <a:pPr algn="ctr"/>
             <a:r>
               <a:rPr lang="en-GB" sz="3600" dirty="0"/>
-              <a:t>2.08 − 1.3 + 0.87</a:t>
+              <a:t>2,08 − 1,3 + 0,87</a:t>
             </a:r>
           </a:p>
         </p:txBody>
@@ -4872,7 +4872,7 @@
             <a:pPr algn="ctr"/>
             <a:r>
               <a:rPr lang="en-GB" sz="3600" dirty="0"/>
-              <a:t>2.7 + 3.5</a:t>
+              <a:t>2,7 + 3,5</a:t>
             </a:r>
           </a:p>
         </p:txBody>
@@ -4913,7 +4913,7 @@
             <a:pPr algn="ctr"/>
             <a:r>
               <a:rPr lang="en-GB" sz="3600" dirty="0"/>
-              <a:t>7.2 − 0.81</a:t>
+              <a:t>7,2 − 0,81</a:t>
             </a:r>
           </a:p>
         </p:txBody>
@@ -4954,7 +4954,7 @@
             <a:pPr algn="ctr"/>
             <a:r>
               <a:rPr lang="en-GB" sz="3600" dirty="0"/>
-              <a:t>0.5 + 1.3 + 2.7</a:t>
+              <a:t>0,5 + 1,3 + 2,7</a:t>
             </a:r>
           </a:p>
         </p:txBody>
@@ -4995,7 +4995,7 @@
             <a:pPr algn="ctr"/>
             <a:r>
               <a:rPr lang="en-GB" sz="3600" dirty="0"/>
-              <a:t>1.28 + 0.92</a:t>
+              <a:t>1,28 + 0,92</a:t>
             </a:r>
           </a:p>
         </p:txBody>
@@ -5036,7 +5036,7 @@
             <a:pPr algn="ctr"/>
             <a:r>
               <a:rPr lang="en-GB" sz="3600" dirty="0"/>
-              <a:t>0.19 + 5.2</a:t>
+              <a:t>0,19 + 5,2</a:t>
             </a:r>
           </a:p>
         </p:txBody>
@@ -5077,7 +5077,7 @@
             <a:pPr algn="ctr"/>
             <a:r>
               <a:rPr lang="en-GB" sz="3600" dirty="0"/>
-              <a:t>7 − 2.5 − 0.7</a:t>
+              <a:t>7 − 2,5 − 0,7</a:t>
             </a:r>
           </a:p>
         </p:txBody>
@@ -5118,7 +5118,7 @@
             <a:pPr algn="ctr"/>
             <a:r>
               <a:rPr lang="en-GB" sz="3600" dirty="0"/>
-              <a:t>0.91 + 3.8 − 0.5</a:t>
+              <a:t>0,91 + 3,8 − 0,5</a:t>
             </a:r>
           </a:p>
         </p:txBody>
@@ -5159,7 +5159,7 @@
             <a:pPr algn="ctr"/>
             <a:r>
               <a:rPr lang="en-GB" sz="3600" dirty="0"/>
-              <a:t>5.1 − 4.5</a:t>
+              <a:t>5,1 − 4,5</a:t>
             </a:r>
           </a:p>
         </p:txBody>
